--- a/刘志彪_产业经济学_第03章_市场结构与市场绩效实证研究(市场势力主线精编).pptx
+++ b/刘志彪_产业经济学_第03章_市场结构与市场绩效实证研究(市场势力主线精编).pptx
@@ -8787,22 +8787,7 @@
               </a:spcAft>
             </a:pPr>
             <a:r>
-              <a:rPr b="1" sz="1250">
-                <a:solidFill>
-                  <a:srgbClr val="1E293B"/>
-                </a:solidFill>
-                <a:latin typeface="微软雅黑"/>
-              </a:rPr>
-              <a:t>估算方法：</a:t>
-            </a:r>
-            <a:r>
-              <a:rPr sz="1250">
-                <a:solidFill>
-                  <a:srgbClr val="1E293B"/>
-                </a:solidFill>
-                <a:latin typeface="宋体"/>
-              </a:rPr>
-              <a:t>DWL = 1/2 * P * Q * eta * (dp/p)^2。</a:t>
+              <a:t>估算方法：DWL = 1/2 * P * Q * eta * (dp/p)²。</a:t>
             </a:r>
           </a:p>
           <a:p>
@@ -8964,22 +8949,7 @@
               </a:spcAft>
             </a:pPr>
             <a:r>
-              <a:rPr b="1" sz="1250">
-                <a:solidFill>
-                  <a:srgbClr val="1E293B"/>
-                </a:solidFill>
-                <a:latin typeface="微软雅黑"/>
-              </a:rPr>
-              <a:t>修正推导：</a:t>
-            </a:r>
-            <a:r>
-              <a:rPr sz="1250">
-                <a:solidFill>
-                  <a:srgbClr val="1E293B"/>
-                </a:solidFill>
-                <a:latin typeface="宋体"/>
-              </a:rPr>
-              <a:t>DWL / Revenue = 1/2 * (HHI / |eta|)^2。</a:t>
+              <a:t>修正推导：DWL / Revenue = 1/2 * (HHI / |eta|)²。</a:t>
             </a:r>
           </a:p>
           <a:p>
@@ -9318,22 +9288,7 @@
               </a:spcAft>
             </a:pPr>
             <a:r>
-              <a:rPr b="1" sz="1250">
-                <a:solidFill>
-                  <a:srgbClr val="1E293B"/>
-                </a:solidFill>
-                <a:latin typeface="微软雅黑"/>
-              </a:rPr>
-              <a:t>计算公式：</a:t>
-            </a:r>
-            <a:r>
-              <a:rPr sz="1250">
-                <a:solidFill>
-                  <a:srgbClr val="1E293B"/>
-                </a:solidFill>
-                <a:latin typeface="宋体"/>
-              </a:rPr>
-              <a:t>CR_n = sum_{i=1}^n S_i (前 n 家企业市场份额之和)。</a:t>
+              <a:t>计算公式：CR_n = sum(i=1)ⁿ S_i (前 n 家企业市场份额之和)。</a:t>
             </a:r>
           </a:p>
           <a:p>
@@ -9899,22 +9854,7 @@
               </a:spcAft>
             </a:pPr>
             <a:r>
-              <a:rPr b="1" sz="1250">
-                <a:solidFill>
-                  <a:srgbClr val="1E293B"/>
-                </a:solidFill>
-                <a:latin typeface="微软雅黑"/>
-              </a:rPr>
-              <a:t>计算公式：</a:t>
-            </a:r>
-            <a:r>
-              <a:rPr sz="1250">
-                <a:solidFill>
-                  <a:srgbClr val="1E293B"/>
-                </a:solidFill>
-                <a:latin typeface="宋体"/>
-              </a:rPr>
-              <a:t>HHI = sum_{i=1}^N S_i^2 (所有企业份额平方和)。</a:t>
+              <a:t>计算公式：HHI = sum(i=1)^N S_i² (所有企业份额平方和)。</a:t>
             </a:r>
           </a:p>
           <a:p>
